--- a/@Materi Kuliah/Materi_Analisis_Multilevel_dan_Longitudinal/Presentasi_Analisis_Multilevel_dan_Longitudinal_Profesional_dari_HTML.pptx
+++ b/@Materi Kuliah/Materi_Analisis_Multilevel_dan_Longitudinal/Presentasi_Analisis_Multilevel_dan_Longitudinal_Profesional_dari_HTML.pptx
@@ -2,131 +2,36 @@
 <file path=ppt/presentation.xml><?xml version="1.0" encoding="utf-8"?>
 <p:presentation xmlns:p="http://schemas.openxmlformats.org/presentationml/2006/main">
   <p:sldMasterIdLst>
-    <p:sldMasterId xmlns:r="http://schemas.openxmlformats.org/officeDocument/2006/relationships" id="2147483648" r:id="R861e12526f4e4cc2"/>
+    <p:sldMasterId xmlns:r="http://schemas.openxmlformats.org/officeDocument/2006/relationships" id="2147483648" r:id="Rfd00516d1f69427b"/>
   </p:sldMasterIdLst>
   <p:notesMasterIdLst>
-    <p:notesMasterId xmlns:r="http://schemas.openxmlformats.org/officeDocument/2006/relationships" r:id="R746f7ea754e24d28"/>
+    <p:notesMasterId xmlns:r="http://schemas.openxmlformats.org/officeDocument/2006/relationships" r:id="R102f4a17653d4d2c"/>
   </p:notesMasterIdLst>
   <p:sldIdLst>
-    <p:sldId xmlns:r="http://schemas.openxmlformats.org/officeDocument/2006/relationships" id="256" r:id="R37541fa488be446a"/>
-    <p:sldId xmlns:r="http://schemas.openxmlformats.org/officeDocument/2006/relationships" id="257" r:id="R0578664914414b14"/>
-    <p:sldId xmlns:r="http://schemas.openxmlformats.org/officeDocument/2006/relationships" id="258" r:id="Rea896d4da738477c"/>
-    <p:sldId xmlns:r="http://schemas.openxmlformats.org/officeDocument/2006/relationships" id="259" r:id="Rd2b6f7330bf14e79"/>
-    <p:sldId xmlns:r="http://schemas.openxmlformats.org/officeDocument/2006/relationships" id="260" r:id="R8cb517fba20a45e6"/>
-    <p:sldId xmlns:r="http://schemas.openxmlformats.org/officeDocument/2006/relationships" id="261" r:id="R9af883bb751341df"/>
-    <p:sldId xmlns:r="http://schemas.openxmlformats.org/officeDocument/2006/relationships" id="262" r:id="R69249d9411a740cf"/>
-    <p:sldId xmlns:r="http://schemas.openxmlformats.org/officeDocument/2006/relationships" id="263" r:id="Re5e58578d3974ca6"/>
-    <p:sldId xmlns:r="http://schemas.openxmlformats.org/officeDocument/2006/relationships" id="264" r:id="Rf5689ee47d1e4351"/>
-    <p:sldId xmlns:r="http://schemas.openxmlformats.org/officeDocument/2006/relationships" id="265" r:id="R2cd43ca18d7f401f"/>
-    <p:sldId xmlns:r="http://schemas.openxmlformats.org/officeDocument/2006/relationships" id="266" r:id="R275ab9f8ff1344ea"/>
-    <p:sldId xmlns:r="http://schemas.openxmlformats.org/officeDocument/2006/relationships" id="267" r:id="R1aa4b8786bf44638"/>
-    <p:sldId xmlns:r="http://schemas.openxmlformats.org/officeDocument/2006/relationships" id="268" r:id="Re3e2342d16454588"/>
-    <p:sldId xmlns:r="http://schemas.openxmlformats.org/officeDocument/2006/relationships" id="269" r:id="Rcec4a510145945e5"/>
-    <p:sldId xmlns:r="http://schemas.openxmlformats.org/officeDocument/2006/relationships" id="270" r:id="Rb0e60ff307de4ede"/>
-    <p:sldId xmlns:r="http://schemas.openxmlformats.org/officeDocument/2006/relationships" id="271" r:id="Rbfd9229f111a4b97"/>
-    <p:sldId xmlns:r="http://schemas.openxmlformats.org/officeDocument/2006/relationships" id="272" r:id="R4fe67c9c9aea433c"/>
-    <p:sldId xmlns:r="http://schemas.openxmlformats.org/officeDocument/2006/relationships" id="273" r:id="R934680484cdc445a"/>
-    <p:sldId xmlns:r="http://schemas.openxmlformats.org/officeDocument/2006/relationships" id="274" r:id="R835e6c6d53624331"/>
-    <p:sldId xmlns:r="http://schemas.openxmlformats.org/officeDocument/2006/relationships" id="275" r:id="R2d25ee8dcb0c45a6"/>
-    <p:sldId xmlns:r="http://schemas.openxmlformats.org/officeDocument/2006/relationships" id="276" r:id="Re0344d80c8d84525"/>
+    <p:sldId xmlns:r="http://schemas.openxmlformats.org/officeDocument/2006/relationships" id="256" r:id="R5ce5d72ed7e44c3b"/>
+    <p:sldId xmlns:r="http://schemas.openxmlformats.org/officeDocument/2006/relationships" id="257" r:id="R9b05dfbbd5734db5"/>
+    <p:sldId xmlns:r="http://schemas.openxmlformats.org/officeDocument/2006/relationships" id="258" r:id="R3a8d8607eb4d4464"/>
+    <p:sldId xmlns:r="http://schemas.openxmlformats.org/officeDocument/2006/relationships" id="259" r:id="R9215ff9e4a1946ae"/>
+    <p:sldId xmlns:r="http://schemas.openxmlformats.org/officeDocument/2006/relationships" id="260" r:id="R409bd0fa5f7147f7"/>
+    <p:sldId xmlns:r="http://schemas.openxmlformats.org/officeDocument/2006/relationships" id="261" r:id="R4e71ce34219a4d40"/>
+    <p:sldId xmlns:r="http://schemas.openxmlformats.org/officeDocument/2006/relationships" id="262" r:id="Rcf5b8635b3744fac"/>
+    <p:sldId xmlns:r="http://schemas.openxmlformats.org/officeDocument/2006/relationships" id="263" r:id="R80d81828014f4255"/>
+    <p:sldId xmlns:r="http://schemas.openxmlformats.org/officeDocument/2006/relationships" id="264" r:id="Rf6a3aa8623b142a5"/>
+    <p:sldId xmlns:r="http://schemas.openxmlformats.org/officeDocument/2006/relationships" id="265" r:id="R278a4b1856cd4294"/>
+    <p:sldId xmlns:r="http://schemas.openxmlformats.org/officeDocument/2006/relationships" id="266" r:id="Rf44b884c4eb04dc5"/>
+    <p:sldId xmlns:r="http://schemas.openxmlformats.org/officeDocument/2006/relationships" id="267" r:id="R30484aec1a7b47a5"/>
+    <p:sldId xmlns:r="http://schemas.openxmlformats.org/officeDocument/2006/relationships" id="268" r:id="R12b69baefdf04728"/>
+    <p:sldId xmlns:r="http://schemas.openxmlformats.org/officeDocument/2006/relationships" id="269" r:id="R7dc985fa770c48c0"/>
+    <p:sldId xmlns:r="http://schemas.openxmlformats.org/officeDocument/2006/relationships" id="270" r:id="R0ca203b1d94b4935"/>
+    <p:sldId xmlns:r="http://schemas.openxmlformats.org/officeDocument/2006/relationships" id="271" r:id="Re5c84908fee44f7f"/>
+    <p:sldId xmlns:r="http://schemas.openxmlformats.org/officeDocument/2006/relationships" id="272" r:id="R1a6a50db94d64613"/>
+    <p:sldId xmlns:r="http://schemas.openxmlformats.org/officeDocument/2006/relationships" id="273" r:id="Rb9b770bd863246af"/>
+    <p:sldId xmlns:r="http://schemas.openxmlformats.org/officeDocument/2006/relationships" id="274" r:id="R9a0eec185a7146bf"/>
+    <p:sldId xmlns:r="http://schemas.openxmlformats.org/officeDocument/2006/relationships" id="275" r:id="R11fc1e0e93414441"/>
+    <p:sldId xmlns:r="http://schemas.openxmlformats.org/officeDocument/2006/relationships" id="276" r:id="R931c8a0f58844ab5"/>
   </p:sldIdLst>
   <p:sldSz cx="12192000" cy="6858000"/>
   <p:notesSz cx="6858000" cy="9144000"/>
-  <p:defaultTextStyle>
-    <a:defPPr xmlns:a="http://schemas.openxmlformats.org/drawingml/2006/main">
-      <a:defRPr lang="en-US"/>
-    </a:defPPr>
-    <a:lvl1pPr xmlns:a="http://schemas.openxmlformats.org/drawingml/2006/main" marL="0" indent="0" algn="l" defTabSz="914400">
-      <a:defRPr sz="1800" kern="1200">
-        <a:solidFill>
-          <a:schemeClr val="tx1"/>
-        </a:solidFill>
-        <a:latin typeface="+mn-lt"/>
-        <a:ea typeface="+mn-ea"/>
-        <a:cs typeface="+mn-cs"/>
-      </a:defRPr>
-    </a:lvl1pPr>
-    <a:lvl2pPr xmlns:a="http://schemas.openxmlformats.org/drawingml/2006/main" marL="457200" indent="0" algn="l" defTabSz="914400">
-      <a:defRPr sz="1800" kern="1200">
-        <a:solidFill>
-          <a:schemeClr val="tx1"/>
-        </a:solidFill>
-        <a:latin typeface="+mn-lt"/>
-        <a:ea typeface="+mn-ea"/>
-        <a:cs typeface="+mn-cs"/>
-      </a:defRPr>
-    </a:lvl2pPr>
-    <a:lvl3pPr xmlns:a="http://schemas.openxmlformats.org/drawingml/2006/main" marL="914400" indent="0" algn="l" defTabSz="914400">
-      <a:defRPr sz="1800" kern="1200">
-        <a:solidFill>
-          <a:schemeClr val="tx1"/>
-        </a:solidFill>
-        <a:latin typeface="+mn-lt"/>
-        <a:ea typeface="+mn-ea"/>
-        <a:cs typeface="+mn-cs"/>
-      </a:defRPr>
-    </a:lvl3pPr>
-    <a:lvl4pPr xmlns:a="http://schemas.openxmlformats.org/drawingml/2006/main" marL="1371600" indent="0" algn="l" defTabSz="914400">
-      <a:defRPr sz="1800" kern="1200">
-        <a:solidFill>
-          <a:schemeClr val="tx1"/>
-        </a:solidFill>
-        <a:latin typeface="+mn-lt"/>
-        <a:ea typeface="+mn-ea"/>
-        <a:cs typeface="+mn-cs"/>
-      </a:defRPr>
-    </a:lvl4pPr>
-    <a:lvl5pPr xmlns:a="http://schemas.openxmlformats.org/drawingml/2006/main" marL="1828800" indent="0" algn="l" defTabSz="914400">
-      <a:defRPr sz="1800" kern="1200">
-        <a:solidFill>
-          <a:schemeClr val="tx1"/>
-        </a:solidFill>
-        <a:latin typeface="+mn-lt"/>
-        <a:ea typeface="+mn-ea"/>
-        <a:cs typeface="+mn-cs"/>
-      </a:defRPr>
-    </a:lvl5pPr>
-    <a:lvl6pPr xmlns:a="http://schemas.openxmlformats.org/drawingml/2006/main" marL="2286000" indent="0" algn="l" defTabSz="914400">
-      <a:defRPr sz="1800" kern="1200">
-        <a:solidFill>
-          <a:schemeClr val="tx1"/>
-        </a:solidFill>
-        <a:latin typeface="+mn-lt"/>
-        <a:ea typeface="+mn-ea"/>
-        <a:cs typeface="+mn-cs"/>
-      </a:defRPr>
-    </a:lvl6pPr>
-    <a:lvl7pPr xmlns:a="http://schemas.openxmlformats.org/drawingml/2006/main" marL="2743200" indent="0" algn="l" defTabSz="914400">
-      <a:defRPr sz="1800" kern="1200">
-        <a:solidFill>
-          <a:schemeClr val="tx1"/>
-        </a:solidFill>
-        <a:latin typeface="+mn-lt"/>
-        <a:ea typeface="+mn-ea"/>
-        <a:cs typeface="+mn-cs"/>
-      </a:defRPr>
-    </a:lvl7pPr>
-    <a:lvl8pPr xmlns:a="http://schemas.openxmlformats.org/drawingml/2006/main" marL="3200400" indent="0" algn="l" defTabSz="914400">
-      <a:defRPr sz="1800" kern="1200">
-        <a:solidFill>
-          <a:schemeClr val="tx1"/>
-        </a:solidFill>
-        <a:latin typeface="+mn-lt"/>
-        <a:ea typeface="+mn-ea"/>
-        <a:cs typeface="+mn-cs"/>
-      </a:defRPr>
-    </a:lvl8pPr>
-    <a:lvl9pPr xmlns:a="http://schemas.openxmlformats.org/drawingml/2006/main" marL="3657600" indent="0" algn="l" defTabSz="914400">
-      <a:defRPr sz="1800" kern="1200">
-        <a:solidFill>
-          <a:schemeClr val="tx1"/>
-        </a:solidFill>
-        <a:latin typeface="+mn-lt"/>
-        <a:ea typeface="+mn-ea"/>
-        <a:cs typeface="+mn-cs"/>
-      </a:defRPr>
-    </a:lvl9pPr>
-  </p:defaultTextStyle>
 </p:presentation>
 </file>
 
@@ -1453,7 +1358,26 @@
         <p:txBody>
           <a:bodyPr xmlns:a="http://schemas.openxmlformats.org/drawingml/2006/main"/>
           <a:lstStyle xmlns:a="http://schemas.openxmlformats.org/drawingml/2006/main"/>
-          <a:p xmlns:a="http://schemas.openxmlformats.org/drawingml/2006/main"/>
+          <a:p xmlns:a="http://schemas.openxmlformats.org/drawingml/2006/main">
+            <a:r>
+              <a:t>[Sources]</a:t>
+            </a:r>
+          </a:p>
+          <a:p xmlns:a="http://schemas.openxmlformats.org/drawingml/2006/main">
+            <a:r>
+              <a:t>- RPS mata kuliah Revisi AI 2026, Program Studi S2 Statistika Terapan FMIPA Universitas Padjadjaran.</a:t>
+            </a:r>
+          </a:p>
+          <a:p xmlns:a="http://schemas.openxmlformats.org/drawingml/2006/main">
+            <a:r>
+              <a:t>[/Sources]</a:t>
+            </a:r>
+          </a:p>
+          <a:p xmlns:a="http://schemas.openxmlformats.org/drawingml/2006/main">
+            <a:r>
+              <a:t>Penutup: CPL tetap. AI adalah akselerator ketercapaian CPMK/Sub-CPMK, bukan pengganti penalaran statistika. Tekankan kewajiban prompt log ringkas, sumber, kode/notebook reproducible, validasi, dan audit trail.</a:t>
+            </a:r>
+          </a:p>
         </p:txBody>
       </p:sp>
       <p:sp>
@@ -2010,8 +1934,8 @@
   </p:cSld>
   <p:clrMap bg1="lt1" tx1="dk1" bg2="lt2" tx2="dk2" accent1="accent1" accent2="accent2" accent3="accent3" accent4="accent4" accent5="accent5" accent6="accent6" hlink="hlink" folHlink="folHlink"/>
   <p:sldLayoutIdLst>
-    <p:sldLayoutId xmlns:r="http://schemas.openxmlformats.org/officeDocument/2006/relationships" id="2147483649" r:id="R6e82cc0258274b9e"/>
-    <p:sldLayoutId xmlns:r="http://schemas.openxmlformats.org/officeDocument/2006/relationships" id="2147483650" r:id="R7ba07d504d3542d7"/>
+    <p:sldLayoutId xmlns:r="http://schemas.openxmlformats.org/officeDocument/2006/relationships" id="2147483649" r:id="Raeddf26e4b134941"/>
+    <p:sldLayoutId xmlns:r="http://schemas.openxmlformats.org/officeDocument/2006/relationships" id="2147483650" r:id="Re2b87aae3028497d"/>
   </p:sldLayoutIdLst>
   <p:hf sldNum="0" hdr="0" ftr="0" dt="0"/>
   <p:txStyles>
@@ -2577,7 +2501,7 @@
           <p:nvPr/>
         </p:nvPicPr>
         <p:blipFill>
-          <a:blip xmlns:r="http://schemas.openxmlformats.org/officeDocument/2006/relationships" xmlns:a="http://schemas.openxmlformats.org/drawingml/2006/main" r:embed="Rc1e496cef84a4f29"/>
+          <a:blip xmlns:r="http://schemas.openxmlformats.org/officeDocument/2006/relationships" xmlns:a="http://schemas.openxmlformats.org/drawingml/2006/main" r:embed="R93637a786af546cf"/>
           <a:stretch xmlns:a="http://schemas.openxmlformats.org/drawingml/2006/main">
             <a:fillRect l="0" t="0" r="0" b="0"/>
           </a:stretch>
@@ -2723,7 +2647,7 @@
           <p:nvPr/>
         </p:nvPicPr>
         <p:blipFill>
-          <a:blip xmlns:r="http://schemas.openxmlformats.org/officeDocument/2006/relationships" xmlns:a="http://schemas.openxmlformats.org/drawingml/2006/main" r:embed="Re7b13d91f22d411c"/>
+          <a:blip xmlns:r="http://schemas.openxmlformats.org/officeDocument/2006/relationships" xmlns:a="http://schemas.openxmlformats.org/drawingml/2006/main" r:embed="Rfb66106a635548dd"/>
           <a:stretch xmlns:a="http://schemas.openxmlformats.org/drawingml/2006/main">
             <a:fillRect l="0" t="0" r="0" b="0"/>
           </a:stretch>
@@ -3345,7 +3269,7 @@
           <p:nvPr/>
         </p:nvPicPr>
         <p:blipFill>
-          <a:blip xmlns:r="http://schemas.openxmlformats.org/officeDocument/2006/relationships" xmlns:a="http://schemas.openxmlformats.org/drawingml/2006/main" r:embed="Re8fff2180eb74030"/>
+          <a:blip xmlns:r="http://schemas.openxmlformats.org/officeDocument/2006/relationships" xmlns:a="http://schemas.openxmlformats.org/drawingml/2006/main" r:embed="R0b09b59a8687479f"/>
           <a:stretch xmlns:a="http://schemas.openxmlformats.org/drawingml/2006/main">
             <a:fillRect l="0" t="0" r="0" b="0"/>
           </a:stretch>
@@ -5495,7 +5419,7 @@
           <p:nvPr/>
         </p:nvPicPr>
         <p:blipFill>
-          <a:blip xmlns:r="http://schemas.openxmlformats.org/officeDocument/2006/relationships" xmlns:a="http://schemas.openxmlformats.org/drawingml/2006/main" r:embed="Rcda5fc7a5e584f1f"/>
+          <a:blip xmlns:r="http://schemas.openxmlformats.org/officeDocument/2006/relationships" xmlns:a="http://schemas.openxmlformats.org/drawingml/2006/main" r:embed="R06648b12b8ab4753"/>
           <a:stretch xmlns:a="http://schemas.openxmlformats.org/drawingml/2006/main">
             <a:fillRect l="0" t="0" r="0" b="0"/>
           </a:stretch>
@@ -5774,7 +5698,7 @@
           <p:nvPr/>
         </p:nvPicPr>
         <p:blipFill>
-          <a:blip xmlns:r="http://schemas.openxmlformats.org/officeDocument/2006/relationships" xmlns:a="http://schemas.openxmlformats.org/drawingml/2006/main" r:embed="Rba2150e859b54309"/>
+          <a:blip xmlns:r="http://schemas.openxmlformats.org/officeDocument/2006/relationships" xmlns:a="http://schemas.openxmlformats.org/drawingml/2006/main" r:embed="R190b3095269e42b0"/>
           <a:stretch xmlns:a="http://schemas.openxmlformats.org/drawingml/2006/main">
             <a:fillRect l="0" t="0" r="0" b="0"/>
           </a:stretch>
@@ -7308,7 +7232,7 @@
           <p:nvPr/>
         </p:nvPicPr>
         <p:blipFill>
-          <a:blip xmlns:r="http://schemas.openxmlformats.org/officeDocument/2006/relationships" xmlns:a="http://schemas.openxmlformats.org/drawingml/2006/main" r:embed="R76f5fae1bf954f1a"/>
+          <a:blip xmlns:r="http://schemas.openxmlformats.org/officeDocument/2006/relationships" xmlns:a="http://schemas.openxmlformats.org/drawingml/2006/main" r:embed="R739984f3e5544091"/>
           <a:stretch xmlns:a="http://schemas.openxmlformats.org/drawingml/2006/main">
             <a:fillRect l="0" t="0" r="0" b="0"/>
           </a:stretch>
@@ -8477,7 +8401,7 @@
           <p:nvPr/>
         </p:nvPicPr>
         <p:blipFill>
-          <a:blip xmlns:r="http://schemas.openxmlformats.org/officeDocument/2006/relationships" xmlns:a="http://schemas.openxmlformats.org/drawingml/2006/main" r:embed="Rec801f34b36f419e"/>
+          <a:blip xmlns:r="http://schemas.openxmlformats.org/officeDocument/2006/relationships" xmlns:a="http://schemas.openxmlformats.org/drawingml/2006/main" r:embed="Rdb7b1375ca1b4b28"/>
           <a:stretch xmlns:a="http://schemas.openxmlformats.org/drawingml/2006/main">
             <a:fillRect l="0" t="0" r="0" b="0"/>
           </a:stretch>
@@ -9704,7 +9628,7 @@
           <p:nvPr/>
         </p:nvPicPr>
         <p:blipFill>
-          <a:blip xmlns:r="http://schemas.openxmlformats.org/officeDocument/2006/relationships" xmlns:a="http://schemas.openxmlformats.org/drawingml/2006/main" r:embed="R2d54f9672c004bb4"/>
+          <a:blip xmlns:r="http://schemas.openxmlformats.org/officeDocument/2006/relationships" xmlns:a="http://schemas.openxmlformats.org/drawingml/2006/main" r:embed="R8103e9629c6c4811"/>
           <a:stretch xmlns:a="http://schemas.openxmlformats.org/drawingml/2006/main">
             <a:fillRect l="0" t="0" r="0" b="0"/>
           </a:stretch>
@@ -10909,7 +10833,7 @@
           <p:nvPr/>
         </p:nvPicPr>
         <p:blipFill>
-          <a:blip xmlns:r="http://schemas.openxmlformats.org/officeDocument/2006/relationships" xmlns:a="http://schemas.openxmlformats.org/drawingml/2006/main" r:embed="R140e0985e6f64118"/>
+          <a:blip xmlns:r="http://schemas.openxmlformats.org/officeDocument/2006/relationships" xmlns:a="http://schemas.openxmlformats.org/drawingml/2006/main" r:embed="R9d1abcd552764842"/>
           <a:stretch xmlns:a="http://schemas.openxmlformats.org/drawingml/2006/main">
             <a:fillRect l="0" t="0" r="0" b="0"/>
           </a:stretch>
@@ -11188,7 +11112,7 @@
           <p:nvPr/>
         </p:nvPicPr>
         <p:blipFill>
-          <a:blip xmlns:r="http://schemas.openxmlformats.org/officeDocument/2006/relationships" xmlns:a="http://schemas.openxmlformats.org/drawingml/2006/main" r:embed="R5e08c21ffe8d4ea5"/>
+          <a:blip xmlns:r="http://schemas.openxmlformats.org/officeDocument/2006/relationships" xmlns:a="http://schemas.openxmlformats.org/drawingml/2006/main" r:embed="Ra09223822b04423d"/>
           <a:stretch xmlns:a="http://schemas.openxmlformats.org/drawingml/2006/main">
             <a:fillRect l="0" t="0" r="0" b="0"/>
           </a:stretch>
@@ -12733,7 +12657,7 @@
           <p:nvPr/>
         </p:nvPicPr>
         <p:blipFill>
-          <a:blip xmlns:r="http://schemas.openxmlformats.org/officeDocument/2006/relationships" xmlns:a="http://schemas.openxmlformats.org/drawingml/2006/main" r:embed="R66abe5119325469b"/>
+          <a:blip xmlns:r="http://schemas.openxmlformats.org/officeDocument/2006/relationships" xmlns:a="http://schemas.openxmlformats.org/drawingml/2006/main" r:embed="R205eddf0b24d4ac8"/>
           <a:stretch xmlns:a="http://schemas.openxmlformats.org/drawingml/2006/main">
             <a:fillRect l="0" t="0" r="0" b="0"/>
           </a:stretch>
@@ -14750,7 +14674,7 @@
           <p:nvPr/>
         </p:nvPicPr>
         <p:blipFill>
-          <a:blip xmlns:r="http://schemas.openxmlformats.org/officeDocument/2006/relationships" xmlns:a="http://schemas.openxmlformats.org/drawingml/2006/main" r:embed="Rd86a325db8b74e25"/>
+          <a:blip xmlns:r="http://schemas.openxmlformats.org/officeDocument/2006/relationships" xmlns:a="http://schemas.openxmlformats.org/drawingml/2006/main" r:embed="R72d6514116bb44bf"/>
           <a:stretch xmlns:a="http://schemas.openxmlformats.org/drawingml/2006/main">
             <a:fillRect l="0" t="0" r="0" b="0"/>
           </a:stretch>
@@ -15977,7 +15901,7 @@
           <p:nvPr/>
         </p:nvPicPr>
         <p:blipFill>
-          <a:blip xmlns:r="http://schemas.openxmlformats.org/officeDocument/2006/relationships" xmlns:a="http://schemas.openxmlformats.org/drawingml/2006/main" r:embed="Rff206bdf179f4529"/>
+          <a:blip xmlns:r="http://schemas.openxmlformats.org/officeDocument/2006/relationships" xmlns:a="http://schemas.openxmlformats.org/drawingml/2006/main" r:embed="R4ddf2f1be1a142bb"/>
           <a:stretch xmlns:a="http://schemas.openxmlformats.org/drawingml/2006/main">
             <a:fillRect l="0" t="0" r="0" b="0"/>
           </a:stretch>
@@ -17118,7 +17042,7 @@
           <p:nvPr/>
         </p:nvPicPr>
         <p:blipFill>
-          <a:blip xmlns:r="http://schemas.openxmlformats.org/officeDocument/2006/relationships" xmlns:a="http://schemas.openxmlformats.org/drawingml/2006/main" r:embed="R99b72302c98247ed"/>
+          <a:blip xmlns:r="http://schemas.openxmlformats.org/officeDocument/2006/relationships" xmlns:a="http://schemas.openxmlformats.org/drawingml/2006/main" r:embed="Rc21ca556394240d8"/>
           <a:stretch xmlns:a="http://schemas.openxmlformats.org/drawingml/2006/main">
             <a:fillRect l="0" t="0" r="0" b="0"/>
           </a:stretch>
@@ -18583,7 +18507,7 @@
           <p:nvPr/>
         </p:nvPicPr>
         <p:blipFill>
-          <a:blip xmlns:r="http://schemas.openxmlformats.org/officeDocument/2006/relationships" xmlns:a="http://schemas.openxmlformats.org/drawingml/2006/main" r:embed="Rf148d28c9be1421d"/>
+          <a:blip xmlns:r="http://schemas.openxmlformats.org/officeDocument/2006/relationships" xmlns:a="http://schemas.openxmlformats.org/drawingml/2006/main" r:embed="R64ed188e08e34673"/>
           <a:stretch xmlns:a="http://schemas.openxmlformats.org/drawingml/2006/main">
             <a:fillRect l="0" t="0" r="0" b="0"/>
           </a:stretch>
@@ -18729,7 +18653,7 @@
           <p:nvPr/>
         </p:nvPicPr>
         <p:blipFill>
-          <a:blip xmlns:r="http://schemas.openxmlformats.org/officeDocument/2006/relationships" xmlns:a="http://schemas.openxmlformats.org/drawingml/2006/main" r:embed="Reed5e74ce9c046f9"/>
+          <a:blip xmlns:r="http://schemas.openxmlformats.org/officeDocument/2006/relationships" xmlns:a="http://schemas.openxmlformats.org/drawingml/2006/main" r:embed="Rcd559b93dc2c49e8"/>
           <a:stretch xmlns:a="http://schemas.openxmlformats.org/drawingml/2006/main">
             <a:fillRect l="0" t="0" r="0" b="0"/>
           </a:stretch>
@@ -18833,7 +18757,7 @@
                 <a:ea typeface="Aptos Display"/>
                 <a:cs typeface="Aptos Display"/>
               </a:rPr>
-              <a:t>Dari data menuju</a:t>
+              <a:t>AI mempercepat proses,</a:t>
             </a:r>
           </a:p>
           <a:p xmlns:a="http://schemas.openxmlformats.org/drawingml/2006/main">
@@ -18849,7 +18773,7 @@
                 <a:ea typeface="Aptos Display"/>
                 <a:cs typeface="Aptos Display"/>
               </a:rPr>
-              <a:t>keputusan yang dapat diuji</a:t>
+              <a:t>penalaran tetap memimpin</a:t>
             </a:r>
           </a:p>
         </p:txBody>
@@ -18916,7 +18840,7 @@
         </p:spPr>
         <p:txBody>
           <a:bodyPr xmlns:a="http://schemas.openxmlformats.org/drawingml/2006/main" wrap="square" lIns="635" tIns="635" rIns="635" bIns="635" anchor="t">
-            <a:normAutofit fontScale="100000"/>
+            <a:normAutofit fontScale="93620"/>
           </a:bodyPr>
           <a:lstStyle xmlns:a="http://schemas.openxmlformats.org/drawingml/2006/main"/>
           <a:p xmlns:a="http://schemas.openxmlformats.org/drawingml/2006/main">
@@ -18932,7 +18856,7 @@
                 <a:ea typeface="Aptos"/>
                 <a:cs typeface="Aptos"/>
               </a:rPr>
-              <a:t>Multilevel &amp; Longitudinal menghubungkan teori, data, metode, validasi, dan komunikasi untuk menghasilkan keputusan yang sahih, dapat direplikasi, dan bertanggung…</a:t>
+              <a:t>Analisis Multilevel dan Longitudinal memadukan teori, data, komputasi, validasi, dan komunikasi. AI mempercepat eksplorasi dan pemeriksaan awal; mahasiswa tetap memverifikasi asumsi, kode, hasil numerik, ketidakpastian, sumber, dan dampak sebelum mengambil keputusan.</a:t>
             </a:r>
           </a:p>
         </p:txBody>
@@ -19102,7 +19026,7 @@
           <p:nvPr/>
         </p:nvPicPr>
         <p:blipFill>
-          <a:blip xmlns:r="http://schemas.openxmlformats.org/officeDocument/2006/relationships" xmlns:a="http://schemas.openxmlformats.org/drawingml/2006/main" r:embed="R72e216b75a024c39"/>
+          <a:blip xmlns:r="http://schemas.openxmlformats.org/officeDocument/2006/relationships" xmlns:a="http://schemas.openxmlformats.org/drawingml/2006/main" r:embed="R11ccf7d5309f4591"/>
           <a:stretch xmlns:a="http://schemas.openxmlformats.org/drawingml/2006/main">
             <a:fillRect l="0" t="0" r="0" b="0"/>
           </a:stretch>
@@ -20233,7 +20157,7 @@
           <p:nvPr/>
         </p:nvPicPr>
         <p:blipFill>
-          <a:blip xmlns:r="http://schemas.openxmlformats.org/officeDocument/2006/relationships" xmlns:a="http://schemas.openxmlformats.org/drawingml/2006/main" r:embed="R9bd17d024df74edb"/>
+          <a:blip xmlns:r="http://schemas.openxmlformats.org/officeDocument/2006/relationships" xmlns:a="http://schemas.openxmlformats.org/drawingml/2006/main" r:embed="Rfd8888b5bcb445b4"/>
           <a:stretch xmlns:a="http://schemas.openxmlformats.org/drawingml/2006/main">
             <a:fillRect l="0" t="0" r="0" b="0"/>
           </a:stretch>
@@ -22337,7 +22261,7 @@
           <p:nvPr/>
         </p:nvPicPr>
         <p:blipFill>
-          <a:blip xmlns:r="http://schemas.openxmlformats.org/officeDocument/2006/relationships" xmlns:a="http://schemas.openxmlformats.org/drawingml/2006/main" r:embed="Rc0917d3b5cb7409f"/>
+          <a:blip xmlns:r="http://schemas.openxmlformats.org/officeDocument/2006/relationships" xmlns:a="http://schemas.openxmlformats.org/drawingml/2006/main" r:embed="R6c7dc166e1004439"/>
           <a:stretch xmlns:a="http://schemas.openxmlformats.org/drawingml/2006/main">
             <a:fillRect l="0" t="0" r="0" b="0"/>
           </a:stretch>
@@ -23619,7 +23543,7 @@
           <p:nvPr/>
         </p:nvPicPr>
         <p:blipFill>
-          <a:blip xmlns:r="http://schemas.openxmlformats.org/officeDocument/2006/relationships" xmlns:a="http://schemas.openxmlformats.org/drawingml/2006/main" r:embed="R297488a8143e472a"/>
+          <a:blip xmlns:r="http://schemas.openxmlformats.org/officeDocument/2006/relationships" xmlns:a="http://schemas.openxmlformats.org/drawingml/2006/main" r:embed="Ra677ca75da214e06"/>
           <a:stretch xmlns:a="http://schemas.openxmlformats.org/drawingml/2006/main">
             <a:fillRect l="0" t="0" r="0" b="0"/>
           </a:stretch>
@@ -23898,7 +23822,7 @@
           <p:nvPr/>
         </p:nvPicPr>
         <p:blipFill>
-          <a:blip xmlns:r="http://schemas.openxmlformats.org/officeDocument/2006/relationships" xmlns:a="http://schemas.openxmlformats.org/drawingml/2006/main" r:embed="R40419a2ce34c4c17"/>
+          <a:blip xmlns:r="http://schemas.openxmlformats.org/officeDocument/2006/relationships" xmlns:a="http://schemas.openxmlformats.org/drawingml/2006/main" r:embed="R8a63901c899244c9"/>
           <a:stretch xmlns:a="http://schemas.openxmlformats.org/drawingml/2006/main">
             <a:fillRect l="0" t="0" r="0" b="0"/>
           </a:stretch>
@@ -25978,7 +25902,7 @@
           <p:nvPr/>
         </p:nvPicPr>
         <p:blipFill>
-          <a:blip xmlns:r="http://schemas.openxmlformats.org/officeDocument/2006/relationships" xmlns:a="http://schemas.openxmlformats.org/drawingml/2006/main" r:embed="R8347cdc3a6624798"/>
+          <a:blip xmlns:r="http://schemas.openxmlformats.org/officeDocument/2006/relationships" xmlns:a="http://schemas.openxmlformats.org/drawingml/2006/main" r:embed="R9d61201f2f9841d7"/>
           <a:stretch xmlns:a="http://schemas.openxmlformats.org/drawingml/2006/main">
             <a:fillRect l="0" t="0" r="0" b="0"/>
           </a:stretch>
@@ -27391,7 +27315,7 @@
           <p:nvPr/>
         </p:nvPicPr>
         <p:blipFill>
-          <a:blip xmlns:r="http://schemas.openxmlformats.org/officeDocument/2006/relationships" xmlns:a="http://schemas.openxmlformats.org/drawingml/2006/main" r:embed="R72d8d10336934792"/>
+          <a:blip xmlns:r="http://schemas.openxmlformats.org/officeDocument/2006/relationships" xmlns:a="http://schemas.openxmlformats.org/drawingml/2006/main" r:embed="Rd6e9e29f36744091"/>
           <a:stretch xmlns:a="http://schemas.openxmlformats.org/drawingml/2006/main">
             <a:fillRect l="0" t="0" r="0" b="0"/>
           </a:stretch>
